--- a/clase2/clase2.pptx
+++ b/clase2/clase2.pptx
@@ -2470,7 +2470,7 @@
                 <a:ea typeface="Oswald" pitchFamily="34" charset="-122"/>
                 <a:cs typeface="Oswald" pitchFamily="34" charset="-120"/>
               </a:rPr>
-              <a:t>Clase 2 de 10</a:t>
+              <a:t>Clase 2 de 7</a:t>
             </a:r>
             <a:endParaRPr lang="es-UY" sz="1600" noProof="0" dirty="0"/>
           </a:p>
